--- a/Project-Title_Shivani.pptx
+++ b/Project-Title_Shivani.pptx
@@ -1857,6 +1857,10 @@
           </a:solidFill>
           <a:ln/>
         </p:spPr>
+        <p:txBody>
+          <a:bodyPr/>
+          <a:p/>
+        </p:txBody>
       </p:sp>
       <p:pic>
         <p:nvPicPr>
@@ -2088,7 +2092,7 @@
                 <a:ea typeface="Inter Bold" pitchFamily="34" charset="-122"/>
                 <a:cs typeface="Inter Bold" pitchFamily="34" charset="-120"/>
               </a:rPr>
-              <a:t>Mr. Raghavendra Roa</a:t>
+              <a:t>Raghavendra Rao M S</a:t>
             </a:r>
             <a:endParaRPr lang="en-US" sz="1300" dirty="0"/>
           </a:p>
@@ -2140,6 +2144,10 @@
           </a:solidFill>
           <a:ln/>
         </p:spPr>
+        <p:txBody>
+          <a:bodyPr/>
+          <a:p/>
+        </p:txBody>
       </p:sp>
       <p:sp>
         <p:nvSpPr>
@@ -2435,7 +2443,7 @@
                 <a:ea typeface="Inter" pitchFamily="34" charset="-122"/>
                 <a:cs typeface="Inter" pitchFamily="34" charset="-120"/>
               </a:rPr>
-              <a:t>The student types a study question, such as 'What is machine learning?'. Empty or over-long input is handled before the AI is called.</a:t>
+              <a:t>The student types a study question, such as 'what is machine learning?', and selects an answer style. Empty or over-long input is handled before the AI is called.</a:t>
             </a:r>
             <a:endParaRPr lang="en-US" sz="1200" dirty="0"/>
           </a:p>
@@ -2477,7 +2485,7 @@
                 <a:ea typeface="Inter Bold" pitchFamily="34" charset="-122"/>
                 <a:cs typeface="Inter Bold" pitchFamily="34" charset="-120"/>
               </a:rPr>
-              <a:t>Exam-Style AI Answer</a:t>
+              <a:t>Loading State</a:t>
             </a:r>
             <a:endParaRPr lang="en-US" sz="1550" dirty="0"/>
           </a:p>
@@ -2521,7 +2529,7 @@
                 <a:ea typeface="Inter" pitchFamily="34" charset="-122"/>
                 <a:cs typeface="Inter" pitchFamily="34" charset="-120"/>
               </a:rPr>
-              <a:t>With the Exam-oriented style, Gemini generates a definition followed by key points, as expected in a semester exam.</a:t>
+              <a:t>While the Gemini model generates the answer, the app shows a Thinking... indicator in the chat window.</a:t>
             </a:r>
             <a:endParaRPr lang="en-US" sz="1200" dirty="0"/>
           </a:p>
@@ -2563,7 +2571,7 @@
                 <a:ea typeface="Inter Bold" pitchFamily="34" charset="-122"/>
                 <a:cs typeface="Inter Bold" pitchFamily="34" charset="-120"/>
               </a:rPr>
-              <a:t>Simple-Style AI Answer</a:t>
+              <a:t>AI-Generated Output</a:t>
             </a:r>
             <a:endParaRPr lang="en-US" sz="1550" dirty="0"/>
           </a:p>
@@ -2607,7 +2615,7 @@
                 <a:ea typeface="Inter" pitchFamily="34" charset="-122"/>
                 <a:cs typeface="Inter" pitchFamily="34" charset="-120"/>
               </a:rPr>
-              <a:t>With the Simple style, the same assistant gives a short, beginner-friendly list of Python topics with easy explanations.</a:t>
+              <a:t>The generated answer in the Exam-oriented style, with a definition followed by key points.</a:t>
             </a:r>
             <a:endParaRPr lang="en-US" sz="1200" dirty="0"/>
           </a:p>
@@ -2775,6 +2783,10 @@
           </a:solidFill>
           <a:ln/>
         </p:spPr>
+        <p:txBody>
+          <a:bodyPr/>
+          <a:p/>
+        </p:txBody>
       </p:sp>
       <p:sp>
         <p:nvSpPr>
@@ -3318,6 +3330,10 @@
             <a:prstDash val="solid"/>
           </a:ln>
         </p:spPr>
+        <p:txBody>
+          <a:bodyPr/>
+          <a:p/>
+        </p:txBody>
       </p:sp>
       <p:sp>
         <p:nvSpPr>
@@ -3431,6 +3447,10 @@
             <a:prstDash val="solid"/>
           </a:ln>
         </p:spPr>
+        <p:txBody>
+          <a:bodyPr/>
+          <a:p/>
+        </p:txBody>
       </p:sp>
       <p:sp>
         <p:nvSpPr>
@@ -3546,6 +3566,10 @@
             <a:prstDash val="solid"/>
           </a:ln>
         </p:spPr>
+        <p:txBody>
+          <a:bodyPr/>
+          <a:p/>
+        </p:txBody>
       </p:sp>
       <p:sp>
         <p:nvSpPr>
@@ -3677,6 +3701,10 @@
           </a:solidFill>
           <a:ln/>
         </p:spPr>
+        <p:txBody>
+          <a:bodyPr/>
+          <a:p/>
+        </p:txBody>
       </p:sp>
       <p:pic>
         <p:nvPicPr>
@@ -3723,6 +3751,10 @@
           </a:solidFill>
           <a:ln/>
         </p:spPr>
+        <p:txBody>
+          <a:bodyPr/>
+          <a:p/>
+        </p:txBody>
       </p:sp>
       <p:sp>
         <p:nvSpPr>
@@ -3878,6 +3910,10 @@
             <a:prstDash val="solid"/>
           </a:ln>
         </p:spPr>
+        <p:txBody>
+          <a:bodyPr/>
+          <a:p/>
+        </p:txBody>
       </p:sp>
       <p:sp>
         <p:nvSpPr>
@@ -3923,6 +3959,10 @@
           </a:solidFill>
           <a:ln/>
         </p:spPr>
+        <p:txBody>
+          <a:bodyPr/>
+          <a:p/>
+        </p:txBody>
       </p:sp>
       <p:sp>
         <p:nvSpPr>
@@ -4054,6 +4094,10 @@
           </a:solidFill>
           <a:ln/>
         </p:spPr>
+        <p:txBody>
+          <a:bodyPr/>
+          <a:p/>
+        </p:txBody>
       </p:sp>
       <p:sp>
         <p:nvSpPr>
@@ -4076,6 +4120,10 @@
           </a:solidFill>
           <a:ln/>
         </p:spPr>
+        <p:txBody>
+          <a:bodyPr/>
+          <a:p/>
+        </p:txBody>
       </p:sp>
       <p:sp>
         <p:nvSpPr>
@@ -4208,6 +4256,10 @@
           </a:solidFill>
           <a:ln/>
         </p:spPr>
+        <p:txBody>
+          <a:bodyPr/>
+          <a:p/>
+        </p:txBody>
       </p:sp>
       <p:sp>
         <p:nvSpPr>
@@ -4230,6 +4282,10 @@
           </a:solidFill>
           <a:ln/>
         </p:spPr>
+        <p:txBody>
+          <a:bodyPr/>
+          <a:p/>
+        </p:txBody>
       </p:sp>
       <p:sp>
         <p:nvSpPr>
@@ -4363,6 +4419,10 @@
           </a:solidFill>
           <a:ln/>
         </p:spPr>
+        <p:txBody>
+          <a:bodyPr/>
+          <a:p/>
+        </p:txBody>
       </p:sp>
       <p:sp>
         <p:nvSpPr>
@@ -5000,6 +5060,10 @@
           </a:solidFill>
           <a:ln/>
         </p:spPr>
+        <p:txBody>
+          <a:bodyPr/>
+          <a:p/>
+        </p:txBody>
       </p:sp>
       <p:sp>
         <p:nvSpPr>
@@ -5879,96 +5943,6 @@
                 <a:cs typeface="Inter" pitchFamily="34" charset="-120"/>
               </a:rPr>
               <a:t>Google GenAI Python SDK — https://github.com/googleapis/python-genai</a:t>
-            </a:r>
-            <a:endParaRPr lang="en-US" sz="1200" dirty="0"/>
-          </a:p>
-        </p:txBody>
-      </p:sp>
-      <p:sp>
-        <p:nvSpPr>
-          <p:cNvPr id="18" name="Shape 16"/>
-          <p:cNvSpPr/>
-          <p:nvPr/>
-        </p:nvSpPr>
-        <p:spPr>
-          <a:xfrm>
-            <a:off x="6288129" y="5269607"/>
-            <a:ext cx="5248441" cy="798116"/>
-          </a:xfrm>
-          <a:prstGeom prst="roundRect">
-            <a:avLst>
-              <a:gd name="adj" fmla="val 8024"/>
-            </a:avLst>
-          </a:prstGeom>
-          <a:solidFill>
-            <a:srgbClr val="D9DFF2"/>
-          </a:solidFill>
-          <a:ln/>
-        </p:spPr>
-      </p:sp>
-      <p:pic>
-        <p:nvPicPr>
-          <p:cNvPr id="19" name="Image 0" descr="preencoded.png"/>
-          <p:cNvPicPr>
-            <a:picLocks noChangeAspect="1"/>
-          </p:cNvPicPr>
-          <p:nvPr/>
-        </p:nvPicPr>
-        <p:blipFill>
-          <a:blip r:embed="rId3"/>
-          <a:stretch>
-            <a:fillRect/>
-          </a:stretch>
-        </p:blipFill>
-        <p:spPr>
-          <a:xfrm>
-            <a:off x="6440525" y="5479951"/>
-            <a:ext cx="190495" cy="152400"/>
-          </a:xfrm>
-          <a:prstGeom prst="rect">
-            <a:avLst/>
-          </a:prstGeom>
-        </p:spPr>
-      </p:pic>
-      <p:sp>
-        <p:nvSpPr>
-          <p:cNvPr id="20" name="Text 17"/>
-          <p:cNvSpPr/>
-          <p:nvPr/>
-        </p:nvSpPr>
-        <p:spPr>
-          <a:xfrm>
-            <a:off x="6783416" y="5434211"/>
-            <a:ext cx="4600758" cy="468908"/>
-          </a:xfrm>
-          <a:prstGeom prst="rect">
-            <a:avLst/>
-          </a:prstGeom>
-          <a:noFill/>
-          <a:ln/>
-        </p:spPr>
-        <p:txBody>
-          <a:bodyPr wrap="square" lIns="0" tIns="0" rIns="0" bIns="0" rtlCol="0" anchor="t">
-            <a:normAutofit/>
-          </a:bodyPr>
-          <a:lstStyle/>
-          <a:p>
-            <a:pPr marL="0" indent="0" algn="l">
-              <a:lnSpc>
-                <a:spcPct val="128000"/>
-              </a:lnSpc>
-              <a:buNone/>
-            </a:pPr>
-            <a:r>
-              <a:rPr lang="en-US" sz="1200" dirty="0">
-                <a:solidFill>
-                  <a:srgbClr val="000000"/>
-                </a:solidFill>
-                <a:latin typeface="Inter" pitchFamily="34" charset="0"/>
-                <a:ea typeface="Inter" pitchFamily="34" charset="-122"/>
-                <a:cs typeface="Inter" pitchFamily="34" charset="-120"/>
-              </a:rPr>
-              <a:t>Use a consistent citation style (e.g., IEEE or APA) throughout this section. Replace all placeholders with actual sources used.</a:t>
             </a:r>
             <a:endParaRPr lang="en-US" sz="1200" dirty="0"/>
           </a:p>
@@ -6144,6 +6118,10 @@
           </a:solidFill>
           <a:ln/>
         </p:spPr>
+        <p:txBody>
+          <a:bodyPr/>
+          <a:p/>
+        </p:txBody>
       </p:sp>
       <p:sp>
         <p:nvSpPr>
@@ -6292,6 +6270,10 @@
           </a:solidFill>
           <a:ln/>
         </p:spPr>
+        <p:txBody>
+          <a:bodyPr/>
+          <a:p/>
+        </p:txBody>
       </p:sp>
       <p:sp>
         <p:nvSpPr>
@@ -6440,6 +6422,10 @@
           </a:solidFill>
           <a:ln/>
         </p:spPr>
+        <p:txBody>
+          <a:bodyPr/>
+          <a:p/>
+        </p:txBody>
       </p:sp>
       <p:sp>
         <p:nvSpPr>
@@ -6588,6 +6574,10 @@
           </a:solidFill>
           <a:ln/>
         </p:spPr>
+        <p:txBody>
+          <a:bodyPr/>
+          <a:p/>
+        </p:txBody>
       </p:sp>
       <p:sp>
         <p:nvSpPr>
@@ -6734,6 +6724,10 @@
           </a:solidFill>
           <a:ln/>
         </p:spPr>
+        <p:txBody>
+          <a:bodyPr/>
+          <a:p/>
+        </p:txBody>
       </p:sp>
       <p:sp>
         <p:nvSpPr>
@@ -6863,6 +6857,10 @@
           </a:solidFill>
           <a:ln/>
         </p:spPr>
+        <p:txBody>
+          <a:bodyPr/>
+          <a:p/>
+        </p:txBody>
       </p:sp>
       <p:pic>
         <p:nvPicPr>
@@ -6909,6 +6907,10 @@
           </a:solidFill>
           <a:ln/>
         </p:spPr>
+        <p:txBody>
+          <a:bodyPr/>
+          <a:p/>
+        </p:txBody>
       </p:sp>
       <p:sp>
         <p:nvSpPr>
@@ -7443,6 +7445,10 @@
           </a:solidFill>
           <a:ln/>
         </p:spPr>
+        <p:txBody>
+          <a:bodyPr/>
+          <a:p/>
+        </p:txBody>
       </p:sp>
       <p:sp>
         <p:nvSpPr>
@@ -7549,6 +7555,10 @@
           </a:solidFill>
           <a:ln/>
         </p:spPr>
+        <p:txBody>
+          <a:bodyPr/>
+          <a:p/>
+        </p:txBody>
       </p:sp>
       <p:sp>
         <p:nvSpPr>
@@ -7975,6 +7985,10 @@
           </a:solidFill>
           <a:ln/>
         </p:spPr>
+        <p:txBody>
+          <a:bodyPr/>
+          <a:p/>
+        </p:txBody>
       </p:sp>
       <p:sp>
         <p:nvSpPr>
@@ -8128,6 +8142,10 @@
             <a:prstDash val="solid"/>
           </a:ln>
         </p:spPr>
+        <p:txBody>
+          <a:bodyPr/>
+          <a:p/>
+        </p:txBody>
       </p:sp>
       <p:sp>
         <p:nvSpPr>
@@ -8281,6 +8299,10 @@
             <a:prstDash val="solid"/>
           </a:ln>
         </p:spPr>
+        <p:txBody>
+          <a:bodyPr/>
+          <a:p/>
+        </p:txBody>
       </p:sp>
       <p:sp>
         <p:nvSpPr>
@@ -8436,6 +8458,10 @@
             <a:prstDash val="solid"/>
           </a:ln>
         </p:spPr>
+        <p:txBody>
+          <a:bodyPr/>
+          <a:p/>
+        </p:txBody>
       </p:sp>
       <p:sp>
         <p:nvSpPr>
@@ -8589,6 +8615,10 @@
             <a:prstDash val="solid"/>
           </a:ln>
         </p:spPr>
+        <p:txBody>
+          <a:bodyPr/>
+          <a:p/>
+        </p:txBody>
       </p:sp>
       <p:sp>
         <p:nvSpPr>
@@ -8742,6 +8772,10 @@
             <a:prstDash val="solid"/>
           </a:ln>
         </p:spPr>
+        <p:txBody>
+          <a:bodyPr/>
+          <a:p/>
+        </p:txBody>
       </p:sp>
       <p:sp>
         <p:nvSpPr>
@@ -8915,6 +8949,10 @@
           </a:solidFill>
           <a:ln/>
         </p:spPr>
+        <p:txBody>
+          <a:bodyPr/>
+          <a:p/>
+        </p:txBody>
       </p:sp>
       <p:sp>
         <p:nvSpPr>
@@ -9569,6 +9607,10 @@
           </a:solidFill>
           <a:ln/>
         </p:spPr>
+        <p:txBody>
+          <a:bodyPr/>
+          <a:p/>
+        </p:txBody>
       </p:sp>
       <p:pic>
         <p:nvPicPr>
@@ -9813,6 +9855,10 @@
           </a:solidFill>
           <a:ln/>
         </p:spPr>
+        <p:txBody>
+          <a:bodyPr/>
+          <a:p/>
+        </p:txBody>
       </p:sp>
       <p:sp>
         <p:nvSpPr>
@@ -10588,6 +10634,10 @@
           </a:solidFill>
           <a:ln/>
         </p:spPr>
+        <p:txBody>
+          <a:bodyPr/>
+          <a:p/>
+        </p:txBody>
       </p:sp>
       <p:sp>
         <p:nvSpPr>
@@ -10957,6 +11007,10 @@
           </a:solidFill>
           <a:ln/>
         </p:spPr>
+        <p:txBody>
+          <a:bodyPr/>
+          <a:p/>
+        </p:txBody>
       </p:sp>
       <p:sp>
         <p:nvSpPr>
@@ -11110,6 +11164,10 @@
             <a:prstDash val="solid"/>
           </a:ln>
         </p:spPr>
+        <p:txBody>
+          <a:bodyPr/>
+          <a:p/>
+        </p:txBody>
       </p:sp>
       <p:sp>
         <p:nvSpPr>
@@ -11223,6 +11281,10 @@
             <a:prstDash val="solid"/>
           </a:ln>
         </p:spPr>
+        <p:txBody>
+          <a:bodyPr/>
+          <a:p/>
+        </p:txBody>
       </p:sp>
       <p:sp>
         <p:nvSpPr>
@@ -11336,6 +11398,10 @@
             <a:prstDash val="solid"/>
           </a:ln>
         </p:spPr>
+        <p:txBody>
+          <a:bodyPr/>
+          <a:p/>
+        </p:txBody>
       </p:sp>
       <p:sp>
         <p:nvSpPr>
@@ -11553,6 +11619,10 @@
           </a:solidFill>
           <a:ln/>
         </p:spPr>
+        <p:txBody>
+          <a:bodyPr/>
+          <a:p/>
+        </p:txBody>
       </p:sp>
       <p:sp>
         <p:nvSpPr>
